--- a/Planning/E-R Diagram.pptx
+++ b/Planning/E-R Diagram.pptx
@@ -104,6 +104,11 @@
       </a:defRPr>
     </a:lvl9pPr>
   </p:defaultTextStyle>
+  <p:extLst>
+    <p:ext uri="{EFAFB233-063F-42B5-8137-9DF3F51BA10A}">
+      <p15:sldGuideLst xmlns:p15="http://schemas.microsoft.com/office/powerpoint/2012/main"/>
+    </p:ext>
+  </p:extLst>
 </p:presentation>
 </file>
 
@@ -13323,7 +13328,7 @@
         <p:spPr>
           <a:xfrm>
             <a:off x="10326874" y="765024"/>
-            <a:ext cx="0" cy="2509898"/>
+            <a:ext cx="10314" cy="2799523"/>
           </a:xfrm>
           <a:prstGeom prst="line">
             <a:avLst/>
@@ -14133,7 +14138,7 @@
         </p:nvSpPr>
         <p:spPr>
           <a:xfrm>
-            <a:off x="10282854" y="3374579"/>
+            <a:off x="10326873" y="3392390"/>
             <a:ext cx="226828" cy="215444"/>
           </a:xfrm>
           <a:prstGeom prst="rect">

--- a/Planning/E-R Diagram.pptx
+++ b/Planning/E-R Diagram.pptx
@@ -3340,10 +3340,10 @@
         </p:nvGrpSpPr>
         <p:grpSpPr>
           <a:xfrm>
-            <a:off x="127590" y="98460"/>
-            <a:ext cx="10105617" cy="6551811"/>
-            <a:chOff x="127590" y="98460"/>
-            <a:chExt cx="10105617" cy="6551811"/>
+            <a:off x="127590" y="134471"/>
+            <a:ext cx="10105617" cy="6674820"/>
+            <a:chOff x="127590" y="-24549"/>
+            <a:chExt cx="10105617" cy="6674820"/>
           </a:xfrm>
         </p:grpSpPr>
         <p:grpSp>
@@ -3360,10 +3360,10 @@
           </p:nvGrpSpPr>
           <p:grpSpPr>
             <a:xfrm>
-              <a:off x="127590" y="98460"/>
-              <a:ext cx="9424235" cy="6551811"/>
-              <a:chOff x="127590" y="98460"/>
-              <a:chExt cx="9424235" cy="6551811"/>
+              <a:off x="127590" y="-24549"/>
+              <a:ext cx="9424235" cy="6674820"/>
+              <a:chOff x="127590" y="-24549"/>
+              <a:chExt cx="9424235" cy="6674820"/>
             </a:xfrm>
           </p:grpSpPr>
           <p:grpSp>
@@ -3380,10 +3380,10 @@
             </p:nvGrpSpPr>
             <p:grpSpPr>
               <a:xfrm>
-                <a:off x="127590" y="98460"/>
-                <a:ext cx="7673929" cy="6551811"/>
-                <a:chOff x="127590" y="98460"/>
-                <a:chExt cx="7673929" cy="6551811"/>
+                <a:off x="127590" y="-24549"/>
+                <a:ext cx="7673929" cy="6674820"/>
+                <a:chOff x="127590" y="-24549"/>
+                <a:chExt cx="7673929" cy="6674820"/>
               </a:xfrm>
             </p:grpSpPr>
             <p:grpSp>
@@ -3400,10 +3400,10 @@
               </p:nvGrpSpPr>
               <p:grpSpPr>
                 <a:xfrm>
-                  <a:off x="127590" y="98460"/>
-                  <a:ext cx="7151385" cy="6551811"/>
-                  <a:chOff x="127590" y="98460"/>
-                  <a:chExt cx="7151385" cy="6551811"/>
+                  <a:off x="127590" y="-24549"/>
+                  <a:ext cx="7151385" cy="6674820"/>
+                  <a:chOff x="127590" y="-24549"/>
+                  <a:chExt cx="7151385" cy="6674820"/>
                 </a:xfrm>
               </p:grpSpPr>
               <p:grpSp>
@@ -3420,10 +3420,10 @@
                 </p:nvGrpSpPr>
                 <p:grpSpPr>
                   <a:xfrm>
-                    <a:off x="127590" y="98460"/>
-                    <a:ext cx="5555344" cy="6551811"/>
-                    <a:chOff x="127590" y="98460"/>
-                    <a:chExt cx="5555344" cy="6551811"/>
+                    <a:off x="127590" y="-24549"/>
+                    <a:ext cx="5555344" cy="6674820"/>
+                    <a:chOff x="127590" y="-24549"/>
+                    <a:chExt cx="5555344" cy="6674820"/>
                   </a:xfrm>
                 </p:grpSpPr>
                 <p:grpSp>
@@ -3440,10 +3440,10 @@
                   </p:nvGrpSpPr>
                   <p:grpSpPr>
                     <a:xfrm>
-                      <a:off x="127590" y="98460"/>
-                      <a:ext cx="5351721" cy="2792074"/>
-                      <a:chOff x="127590" y="98460"/>
-                      <a:chExt cx="5351721" cy="2792074"/>
+                      <a:off x="127590" y="-24549"/>
+                      <a:ext cx="5351721" cy="2915083"/>
+                      <a:chOff x="127590" y="-24549"/>
+                      <a:chExt cx="5351721" cy="2915083"/>
                     </a:xfrm>
                   </p:grpSpPr>
                   <p:grpSp>
@@ -3460,10 +3460,10 @@
                     </p:nvGrpSpPr>
                     <p:grpSpPr>
                       <a:xfrm>
-                        <a:off x="127590" y="98460"/>
-                        <a:ext cx="5351721" cy="2792074"/>
-                        <a:chOff x="744279" y="1643725"/>
-                        <a:chExt cx="5351721" cy="2792074"/>
+                        <a:off x="127590" y="-24549"/>
+                        <a:ext cx="5351721" cy="2915083"/>
+                        <a:chOff x="744279" y="1520716"/>
+                        <a:chExt cx="5351721" cy="2915083"/>
                       </a:xfrm>
                     </p:grpSpPr>
                     <p:grpSp>
@@ -3480,10 +3480,10 @@
                       </p:nvGrpSpPr>
                       <p:grpSpPr>
                         <a:xfrm>
-                          <a:off x="744279" y="1643725"/>
-                          <a:ext cx="5351721" cy="2792074"/>
-                          <a:chOff x="744279" y="1643725"/>
-                          <a:chExt cx="5351721" cy="2792074"/>
+                          <a:off x="744279" y="1520716"/>
+                          <a:ext cx="5351721" cy="2915083"/>
+                          <a:chOff x="744279" y="1520716"/>
+                          <a:chExt cx="5351721" cy="2915083"/>
                         </a:xfrm>
                       </p:grpSpPr>
                       <p:grpSp>
@@ -3500,10 +3500,10 @@
                         </p:nvGrpSpPr>
                         <p:grpSpPr>
                           <a:xfrm>
-                            <a:off x="2766064" y="1643725"/>
-                            <a:ext cx="3329936" cy="2601868"/>
-                            <a:chOff x="1849152" y="1636636"/>
-                            <a:chExt cx="3329936" cy="2601868"/>
+                            <a:off x="2766064" y="1520716"/>
+                            <a:ext cx="3329936" cy="2724877"/>
+                            <a:chOff x="1849152" y="1513627"/>
+                            <a:chExt cx="3329936" cy="2724877"/>
                           </a:xfrm>
                         </p:grpSpPr>
                         <p:sp>
@@ -3876,8 +3876,8 @@
                           </p:nvCxnSpPr>
                           <p:spPr>
                             <a:xfrm flipV="1">
-                              <a:off x="3705069" y="1748516"/>
-                              <a:ext cx="0" cy="2274544"/>
+                              <a:off x="3705069" y="1513627"/>
+                              <a:ext cx="0" cy="2509433"/>
                             </a:xfrm>
                             <a:prstGeom prst="line">
                               <a:avLst/>
@@ -10517,7 +10517,7 @@
         </p:nvSpPr>
         <p:spPr>
           <a:xfrm>
-            <a:off x="10245828" y="3564547"/>
+            <a:off x="10245828" y="3723567"/>
             <a:ext cx="753662" cy="318197"/>
           </a:xfrm>
           <a:prstGeom prst="rect">
@@ -10566,7 +10566,7 @@
         </p:nvSpPr>
         <p:spPr>
           <a:xfrm>
-            <a:off x="8990095" y="5709504"/>
+            <a:off x="8990095" y="5868524"/>
             <a:ext cx="1305367" cy="212379"/>
           </a:xfrm>
           <a:prstGeom prst="ellipse">
@@ -10618,7 +10618,7 @@
         </p:nvSpPr>
         <p:spPr>
           <a:xfrm>
-            <a:off x="10857625" y="4075738"/>
+            <a:off x="10857625" y="4234758"/>
             <a:ext cx="1305367" cy="212379"/>
           </a:xfrm>
           <a:prstGeom prst="ellipse">
@@ -10671,7 +10671,7 @@
         </p:nvSpPr>
         <p:spPr>
           <a:xfrm>
-            <a:off x="8983371" y="5989400"/>
+            <a:off x="8983371" y="6148420"/>
             <a:ext cx="1305367" cy="212379"/>
           </a:xfrm>
           <a:prstGeom prst="ellipse">
@@ -10724,7 +10724,7 @@
         </p:nvSpPr>
         <p:spPr>
           <a:xfrm>
-            <a:off x="10857624" y="4316777"/>
+            <a:off x="10857624" y="4475797"/>
             <a:ext cx="1305367" cy="212379"/>
           </a:xfrm>
           <a:prstGeom prst="ellipse">
@@ -10776,7 +10776,7 @@
         </p:nvSpPr>
         <p:spPr>
           <a:xfrm>
-            <a:off x="8983371" y="6257072"/>
+            <a:off x="8983371" y="6416092"/>
             <a:ext cx="1305367" cy="212379"/>
           </a:xfrm>
           <a:prstGeom prst="ellipse">
@@ -10828,7 +10828,7 @@
         </p:nvSpPr>
         <p:spPr>
           <a:xfrm>
-            <a:off x="10857621" y="4585138"/>
+            <a:off x="10857621" y="4744158"/>
             <a:ext cx="1305367" cy="212379"/>
           </a:xfrm>
           <a:prstGeom prst="ellipse">
@@ -10880,7 +10880,7 @@
         </p:nvSpPr>
         <p:spPr>
           <a:xfrm>
-            <a:off x="10857621" y="6257073"/>
+            <a:off x="10857621" y="6416093"/>
             <a:ext cx="1305367" cy="212379"/>
           </a:xfrm>
           <a:prstGeom prst="ellipse">
@@ -10932,7 +10932,7 @@
         </p:nvSpPr>
         <p:spPr>
           <a:xfrm>
-            <a:off x="10857621" y="4856999"/>
+            <a:off x="10857621" y="5016019"/>
             <a:ext cx="1305367" cy="212379"/>
           </a:xfrm>
           <a:prstGeom prst="ellipse">
@@ -10984,7 +10984,7 @@
         </p:nvSpPr>
         <p:spPr>
           <a:xfrm>
-            <a:off x="10857621" y="5989400"/>
+            <a:off x="10857621" y="6148420"/>
             <a:ext cx="1305367" cy="212379"/>
           </a:xfrm>
           <a:prstGeom prst="ellipse">
@@ -11036,7 +11036,7 @@
         </p:nvSpPr>
         <p:spPr>
           <a:xfrm>
-            <a:off x="10857621" y="5138759"/>
+            <a:off x="10857621" y="5297779"/>
             <a:ext cx="1305367" cy="212379"/>
           </a:xfrm>
           <a:prstGeom prst="ellipse">
@@ -11088,7 +11088,7 @@
         </p:nvSpPr>
         <p:spPr>
           <a:xfrm>
-            <a:off x="10857621" y="5702780"/>
+            <a:off x="10857621" y="5861800"/>
             <a:ext cx="1305367" cy="212379"/>
           </a:xfrm>
           <a:prstGeom prst="ellipse">
@@ -11141,7 +11141,7 @@
         </p:nvSpPr>
         <p:spPr>
           <a:xfrm>
-            <a:off x="10857621" y="5416160"/>
+            <a:off x="10857621" y="5575180"/>
             <a:ext cx="1305367" cy="212379"/>
           </a:xfrm>
           <a:prstGeom prst="ellipse">
@@ -11196,7 +11196,7 @@
         </p:nvCxnSpPr>
         <p:spPr>
           <a:xfrm flipV="1">
-            <a:off x="10686511" y="3881257"/>
+            <a:off x="10686511" y="4040277"/>
             <a:ext cx="310" cy="2491564"/>
           </a:xfrm>
           <a:prstGeom prst="line">
@@ -11239,7 +11239,7 @@
         </p:nvCxnSpPr>
         <p:spPr>
           <a:xfrm flipV="1">
-            <a:off x="10451492" y="3881256"/>
+            <a:off x="10451492" y="4040276"/>
             <a:ext cx="0" cy="2491565"/>
           </a:xfrm>
           <a:prstGeom prst="line">
@@ -11280,7 +11280,7 @@
         </p:nvCxnSpPr>
         <p:spPr>
           <a:xfrm flipH="1">
-            <a:off x="10688983" y="4184763"/>
+            <a:off x="10688983" y="4343783"/>
             <a:ext cx="168638" cy="0"/>
           </a:xfrm>
           <a:prstGeom prst="line">
@@ -11321,7 +11321,7 @@
         </p:nvCxnSpPr>
         <p:spPr>
           <a:xfrm flipH="1">
-            <a:off x="10688983" y="4425802"/>
+            <a:off x="10688983" y="4584822"/>
             <a:ext cx="168638" cy="0"/>
           </a:xfrm>
           <a:prstGeom prst="line">
@@ -11362,7 +11362,7 @@
         </p:nvCxnSpPr>
         <p:spPr>
           <a:xfrm flipH="1">
-            <a:off x="10688983" y="4700887"/>
+            <a:off x="10688983" y="4859907"/>
             <a:ext cx="168638" cy="0"/>
           </a:xfrm>
           <a:prstGeom prst="line">
@@ -11403,7 +11403,7 @@
         </p:nvCxnSpPr>
         <p:spPr>
           <a:xfrm flipH="1">
-            <a:off x="10699958" y="4972748"/>
+            <a:off x="10699958" y="5131768"/>
             <a:ext cx="168638" cy="0"/>
           </a:xfrm>
           <a:prstGeom prst="line">
@@ -11444,7 +11444,7 @@
         </p:nvCxnSpPr>
         <p:spPr>
           <a:xfrm flipH="1">
-            <a:off x="10686511" y="5522349"/>
+            <a:off x="10686511" y="5681369"/>
             <a:ext cx="168638" cy="0"/>
           </a:xfrm>
           <a:prstGeom prst="line">
@@ -11485,7 +11485,7 @@
         </p:nvCxnSpPr>
         <p:spPr>
           <a:xfrm flipH="1">
-            <a:off x="10686511" y="5808969"/>
+            <a:off x="10686511" y="5967989"/>
             <a:ext cx="168638" cy="0"/>
           </a:xfrm>
           <a:prstGeom prst="line">
@@ -11526,7 +11526,7 @@
         </p:nvCxnSpPr>
         <p:spPr>
           <a:xfrm flipH="1">
-            <a:off x="10699958" y="6095589"/>
+            <a:off x="10699958" y="6254609"/>
             <a:ext cx="168638" cy="0"/>
           </a:xfrm>
           <a:prstGeom prst="line">
@@ -11567,7 +11567,7 @@
         </p:nvCxnSpPr>
         <p:spPr>
           <a:xfrm flipH="1">
-            <a:off x="10686511" y="6372821"/>
+            <a:off x="10686511" y="6531841"/>
             <a:ext cx="168638" cy="0"/>
           </a:xfrm>
           <a:prstGeom prst="line">
@@ -11608,7 +11608,7 @@
         </p:nvCxnSpPr>
         <p:spPr>
           <a:xfrm flipH="1">
-            <a:off x="10282854" y="5825252"/>
+            <a:off x="10282854" y="5984272"/>
             <a:ext cx="168638" cy="0"/>
           </a:xfrm>
           <a:prstGeom prst="line">
@@ -11649,7 +11649,7 @@
         </p:nvCxnSpPr>
         <p:spPr>
           <a:xfrm flipH="1">
-            <a:off x="10273659" y="6105149"/>
+            <a:off x="10273659" y="6264169"/>
             <a:ext cx="168638" cy="0"/>
           </a:xfrm>
           <a:prstGeom prst="line">
@@ -11690,7 +11690,7 @@
         </p:nvCxnSpPr>
         <p:spPr>
           <a:xfrm flipH="1">
-            <a:off x="10273659" y="6372821"/>
+            <a:off x="10273659" y="6531841"/>
             <a:ext cx="168638" cy="0"/>
           </a:xfrm>
           <a:prstGeom prst="line">
@@ -11731,7 +11731,7 @@
         </p:nvSpPr>
         <p:spPr>
           <a:xfrm>
-            <a:off x="8994506" y="5409998"/>
+            <a:off x="8994506" y="5569018"/>
             <a:ext cx="1305367" cy="212379"/>
           </a:xfrm>
           <a:prstGeom prst="ellipse">
@@ -11784,7 +11784,7 @@
         </p:nvSpPr>
         <p:spPr>
           <a:xfrm>
-            <a:off x="8713365" y="3544143"/>
+            <a:off x="8713365" y="3703163"/>
             <a:ext cx="226828" cy="215444"/>
           </a:xfrm>
           <a:prstGeom prst="rect">
@@ -11819,7 +11819,7 @@
         </p:nvSpPr>
         <p:spPr>
           <a:xfrm>
-            <a:off x="10068634" y="3541838"/>
+            <a:off x="10068634" y="3700858"/>
             <a:ext cx="226828" cy="215444"/>
           </a:xfrm>
           <a:prstGeom prst="rect">
@@ -11854,7 +11854,7 @@
         </p:nvCxnSpPr>
         <p:spPr>
           <a:xfrm flipH="1">
-            <a:off x="10295462" y="5516187"/>
+            <a:off x="10295462" y="5675207"/>
             <a:ext cx="168638" cy="0"/>
           </a:xfrm>
           <a:prstGeom prst="line">
@@ -11897,7 +11897,7 @@
         </p:nvCxnSpPr>
         <p:spPr>
           <a:xfrm rot="10800000" flipV="1">
-            <a:off x="8713366" y="3810573"/>
+            <a:off x="8713366" y="3969593"/>
             <a:ext cx="1532463" cy="506204"/>
           </a:xfrm>
           <a:prstGeom prst="bentConnector3">
@@ -11940,7 +11940,7 @@
         </p:nvSpPr>
         <p:spPr>
           <a:xfrm>
-            <a:off x="8019531" y="4018849"/>
+            <a:off x="8019531" y="4177869"/>
             <a:ext cx="689237" cy="595856"/>
           </a:xfrm>
           <a:prstGeom prst="diamond">
@@ -11989,7 +11989,7 @@
         </p:nvSpPr>
         <p:spPr>
           <a:xfrm>
-            <a:off x="8110916" y="4152365"/>
+            <a:off x="8110916" y="4311385"/>
             <a:ext cx="524435" cy="338554"/>
           </a:xfrm>
           <a:prstGeom prst="rect">
@@ -12040,7 +12040,7 @@
         </p:nvSpPr>
         <p:spPr>
           <a:xfrm>
-            <a:off x="5840921" y="4157167"/>
+            <a:off x="5840921" y="4316187"/>
             <a:ext cx="753662" cy="318197"/>
           </a:xfrm>
           <a:prstGeom prst="rect">
@@ -12093,7 +12093,7 @@
         </p:nvCxnSpPr>
         <p:spPr>
           <a:xfrm flipH="1" flipV="1">
-            <a:off x="6594583" y="4316266"/>
+            <a:off x="6594583" y="4475286"/>
             <a:ext cx="1424948" cy="511"/>
           </a:xfrm>
           <a:prstGeom prst="line">
@@ -12134,7 +12134,7 @@
         </p:nvSpPr>
         <p:spPr>
           <a:xfrm>
-            <a:off x="6019723" y="4652321"/>
+            <a:off x="6019723" y="4811341"/>
             <a:ext cx="1305367" cy="212379"/>
           </a:xfrm>
           <a:prstGeom prst="ellipse">
@@ -12186,7 +12186,7 @@
         </p:nvSpPr>
         <p:spPr>
           <a:xfrm>
-            <a:off x="6019722" y="4921669"/>
+            <a:off x="6019722" y="5080689"/>
             <a:ext cx="1305367" cy="212379"/>
           </a:xfrm>
           <a:prstGeom prst="ellipse">
@@ -12239,7 +12239,7 @@
         </p:nvSpPr>
         <p:spPr>
           <a:xfrm>
-            <a:off x="6019722" y="5208654"/>
+            <a:off x="6019722" y="5367674"/>
             <a:ext cx="1305367" cy="212379"/>
           </a:xfrm>
           <a:prstGeom prst="ellipse">
@@ -12292,7 +12292,7 @@
         </p:nvSpPr>
         <p:spPr>
           <a:xfrm>
-            <a:off x="6019721" y="5476953"/>
+            <a:off x="6019721" y="5635973"/>
             <a:ext cx="1305367" cy="212379"/>
           </a:xfrm>
           <a:prstGeom prst="ellipse">
@@ -12344,7 +12344,7 @@
         </p:nvSpPr>
         <p:spPr>
           <a:xfrm>
-            <a:off x="6019721" y="5760099"/>
+            <a:off x="6019721" y="5919119"/>
             <a:ext cx="1305367" cy="212379"/>
           </a:xfrm>
           <a:prstGeom prst="ellipse">
@@ -12398,7 +12398,7 @@
         </p:nvCxnSpPr>
         <p:spPr>
           <a:xfrm flipH="1">
-            <a:off x="5840020" y="4475364"/>
+            <a:off x="5840020" y="4634384"/>
             <a:ext cx="901" cy="1390924"/>
           </a:xfrm>
           <a:prstGeom prst="line">
@@ -12439,7 +12439,7 @@
         </p:nvCxnSpPr>
         <p:spPr>
           <a:xfrm flipH="1">
-            <a:off x="5840921" y="4758510"/>
+            <a:off x="5840921" y="4917530"/>
             <a:ext cx="168638" cy="0"/>
           </a:xfrm>
           <a:prstGeom prst="line">
@@ -12480,7 +12480,7 @@
         </p:nvCxnSpPr>
         <p:spPr>
           <a:xfrm flipH="1">
-            <a:off x="5840020" y="5027858"/>
+            <a:off x="5840020" y="5186878"/>
             <a:ext cx="168638" cy="0"/>
           </a:xfrm>
           <a:prstGeom prst="line">
@@ -12521,7 +12521,7 @@
         </p:nvCxnSpPr>
         <p:spPr>
           <a:xfrm flipH="1">
-            <a:off x="5840020" y="5314843"/>
+            <a:off x="5840020" y="5473863"/>
             <a:ext cx="168638" cy="0"/>
           </a:xfrm>
           <a:prstGeom prst="line">
@@ -12562,7 +12562,7 @@
         </p:nvCxnSpPr>
         <p:spPr>
           <a:xfrm flipH="1">
-            <a:off x="5840020" y="5583142"/>
+            <a:off x="5840020" y="5742162"/>
             <a:ext cx="168638" cy="0"/>
           </a:xfrm>
           <a:prstGeom prst="line">
@@ -12603,7 +12603,7 @@
         </p:nvCxnSpPr>
         <p:spPr>
           <a:xfrm flipH="1">
-            <a:off x="5840020" y="5866288"/>
+            <a:off x="5840020" y="6025308"/>
             <a:ext cx="168638" cy="0"/>
           </a:xfrm>
           <a:prstGeom prst="line">
@@ -12644,7 +12644,7 @@
         </p:nvSpPr>
         <p:spPr>
           <a:xfrm>
-            <a:off x="10514255" y="2546898"/>
+            <a:off x="10514255" y="2705918"/>
             <a:ext cx="689237" cy="595856"/>
           </a:xfrm>
           <a:prstGeom prst="diamond">
@@ -12693,7 +12693,7 @@
         </p:nvSpPr>
         <p:spPr>
           <a:xfrm>
-            <a:off x="10598574" y="2738913"/>
+            <a:off x="10598574" y="2897933"/>
             <a:ext cx="524435" cy="215444"/>
           </a:xfrm>
           <a:prstGeom prst="rect">
@@ -12733,7 +12733,7 @@
         </p:nvSpPr>
         <p:spPr>
           <a:xfrm>
-            <a:off x="10454260" y="1800874"/>
+            <a:off x="10454260" y="1959894"/>
             <a:ext cx="753662" cy="318197"/>
           </a:xfrm>
           <a:prstGeom prst="rect">
@@ -12784,7 +12784,7 @@
         </p:nvCxnSpPr>
         <p:spPr>
           <a:xfrm flipV="1">
-            <a:off x="10864709" y="3142754"/>
+            <a:off x="10864709" y="3301774"/>
             <a:ext cx="0" cy="421793"/>
           </a:xfrm>
           <a:prstGeom prst="line">
@@ -12827,7 +12827,7 @@
         </p:nvCxnSpPr>
         <p:spPr>
           <a:xfrm flipV="1">
-            <a:off x="10845670" y="2125105"/>
+            <a:off x="10845670" y="2284125"/>
             <a:ext cx="0" cy="421793"/>
           </a:xfrm>
           <a:prstGeom prst="line">
@@ -12868,7 +12868,7 @@
         </p:nvSpPr>
         <p:spPr>
           <a:xfrm>
-            <a:off x="10770830" y="1349775"/>
+            <a:off x="10770830" y="1508795"/>
             <a:ext cx="1305367" cy="212379"/>
           </a:xfrm>
           <a:prstGeom prst="ellipse">
@@ -12920,7 +12920,7 @@
         </p:nvSpPr>
         <p:spPr>
           <a:xfrm>
-            <a:off x="10767617" y="1086654"/>
+            <a:off x="10767617" y="1245674"/>
             <a:ext cx="1305367" cy="212379"/>
           </a:xfrm>
           <a:prstGeom prst="ellipse">
@@ -12972,7 +12972,7 @@
         </p:nvCxnSpPr>
         <p:spPr>
           <a:xfrm flipH="1">
-            <a:off x="10598574" y="1192843"/>
+            <a:off x="10598574" y="1351863"/>
             <a:ext cx="168638" cy="0"/>
           </a:xfrm>
           <a:prstGeom prst="line">
@@ -13013,7 +13013,7 @@
         </p:nvCxnSpPr>
         <p:spPr>
           <a:xfrm flipH="1">
-            <a:off x="10598574" y="1455964"/>
+            <a:off x="10598574" y="1614984"/>
             <a:ext cx="168638" cy="0"/>
           </a:xfrm>
           <a:prstGeom prst="line">
@@ -13054,7 +13054,7 @@
         </p:nvCxnSpPr>
         <p:spPr>
           <a:xfrm>
-            <a:off x="10598574" y="1192843"/>
+            <a:off x="10598574" y="1351863"/>
             <a:ext cx="0" cy="608031"/>
           </a:xfrm>
           <a:prstGeom prst="line">
@@ -13095,7 +13095,7 @@
         </p:nvSpPr>
         <p:spPr>
           <a:xfrm>
-            <a:off x="10080448" y="3801665"/>
+            <a:off x="10080448" y="3960685"/>
             <a:ext cx="226828" cy="215444"/>
           </a:xfrm>
           <a:prstGeom prst="rect">
@@ -13130,7 +13130,7 @@
         </p:nvSpPr>
         <p:spPr>
           <a:xfrm>
-            <a:off x="6535058" y="4130751"/>
+            <a:off x="6535058" y="4289771"/>
             <a:ext cx="226828" cy="215444"/>
           </a:xfrm>
           <a:prstGeom prst="rect">
@@ -13165,7 +13165,7 @@
         </p:nvSpPr>
         <p:spPr>
           <a:xfrm>
-            <a:off x="10670863" y="3384690"/>
+            <a:off x="10670863" y="3543710"/>
             <a:ext cx="226828" cy="215444"/>
           </a:xfrm>
           <a:prstGeom prst="rect">
@@ -13200,7 +13200,7 @@
         </p:nvSpPr>
         <p:spPr>
           <a:xfrm>
-            <a:off x="10653798" y="2133517"/>
+            <a:off x="10653798" y="2292537"/>
             <a:ext cx="226828" cy="215444"/>
           </a:xfrm>
           <a:prstGeom prst="rect">
@@ -13235,7 +13235,7 @@
         </p:nvSpPr>
         <p:spPr>
           <a:xfrm>
-            <a:off x="9982255" y="169168"/>
+            <a:off x="9982255" y="328188"/>
             <a:ext cx="689237" cy="595856"/>
           </a:xfrm>
           <a:prstGeom prst="diamond">
@@ -13284,7 +13284,7 @@
         </p:nvSpPr>
         <p:spPr>
           <a:xfrm>
-            <a:off x="10042170" y="326803"/>
+            <a:off x="10042170" y="485823"/>
             <a:ext cx="621985" cy="338554"/>
           </a:xfrm>
           <a:prstGeom prst="rect">
@@ -13327,7 +13327,7 @@
         </p:nvCxnSpPr>
         <p:spPr>
           <a:xfrm>
-            <a:off x="10326874" y="765024"/>
+            <a:off x="10326874" y="924044"/>
             <a:ext cx="10314" cy="2799523"/>
           </a:xfrm>
           <a:prstGeom prst="line">
@@ -13368,7 +13368,7 @@
         </p:nvSpPr>
         <p:spPr>
           <a:xfrm>
-            <a:off x="8375090" y="307997"/>
+            <a:off x="8375090" y="467017"/>
             <a:ext cx="753662" cy="318197"/>
           </a:xfrm>
           <a:prstGeom prst="rect">
@@ -13417,7 +13417,7 @@
         </p:nvSpPr>
         <p:spPr>
           <a:xfrm>
-            <a:off x="6163105" y="140109"/>
+            <a:off x="6163105" y="299129"/>
             <a:ext cx="1305367" cy="212379"/>
           </a:xfrm>
           <a:prstGeom prst="ellipse">
@@ -13469,7 +13469,7 @@
         </p:nvSpPr>
         <p:spPr>
           <a:xfrm>
-            <a:off x="6163439" y="390413"/>
+            <a:off x="6163439" y="549433"/>
             <a:ext cx="1305367" cy="212379"/>
           </a:xfrm>
           <a:prstGeom prst="ellipse">
@@ -13521,7 +13521,7 @@
         </p:nvSpPr>
         <p:spPr>
           <a:xfrm>
-            <a:off x="6163104" y="649139"/>
+            <a:off x="6163104" y="808159"/>
             <a:ext cx="1305367" cy="212379"/>
           </a:xfrm>
           <a:prstGeom prst="ellipse">
@@ -13573,7 +13573,7 @@
         </p:nvSpPr>
         <p:spPr>
           <a:xfrm>
-            <a:off x="6163103" y="914921"/>
+            <a:off x="6163103" y="1073941"/>
             <a:ext cx="1305367" cy="212379"/>
           </a:xfrm>
           <a:prstGeom prst="ellipse">
@@ -13625,7 +13625,7 @@
         </p:nvSpPr>
         <p:spPr>
           <a:xfrm>
-            <a:off x="6163103" y="1177895"/>
+            <a:off x="6163103" y="1336915"/>
             <a:ext cx="1305367" cy="212379"/>
           </a:xfrm>
           <a:prstGeom prst="ellipse">
@@ -13663,59 +13663,6 @@
           </a:p>
         </p:txBody>
       </p:sp>
-      <p:sp>
-        <p:nvSpPr>
-          <p:cNvPr id="437" name="Oval 436">
-            <a:extLst>
-              <a:ext uri="{FF2B5EF4-FFF2-40B4-BE49-F238E27FC236}">
-                <a16:creationId xmlns:a16="http://schemas.microsoft.com/office/drawing/2014/main" id="{CF89D242-D9C9-05C8-6F7C-829F3739E3AA}"/>
-              </a:ext>
-            </a:extLst>
-          </p:cNvPr>
-          <p:cNvSpPr/>
-          <p:nvPr/>
-        </p:nvSpPr>
-        <p:spPr>
-          <a:xfrm>
-            <a:off x="6163103" y="1446387"/>
-            <a:ext cx="1305367" cy="212379"/>
-          </a:xfrm>
-          <a:prstGeom prst="ellipse">
-            <a:avLst/>
-          </a:prstGeom>
-          <a:solidFill>
-            <a:schemeClr val="accent6"/>
-          </a:solidFill>
-        </p:spPr>
-        <p:style>
-          <a:lnRef idx="2">
-            <a:schemeClr val="accent1">
-              <a:shade val="15000"/>
-            </a:schemeClr>
-          </a:lnRef>
-          <a:fillRef idx="1">
-            <a:schemeClr val="accent1"/>
-          </a:fillRef>
-          <a:effectRef idx="0">
-            <a:schemeClr val="accent1"/>
-          </a:effectRef>
-          <a:fontRef idx="minor">
-            <a:schemeClr val="lt1"/>
-          </a:fontRef>
-        </p:style>
-        <p:txBody>
-          <a:bodyPr rtlCol="0" anchor="ctr"/>
-          <a:lstStyle/>
-          <a:p>
-            <a:pPr algn="ctr"/>
-            <a:r>
-              <a:rPr lang="en-US" sz="800" dirty="0" err="1"/>
-              <a:t>product_id</a:t>
-            </a:r>
-            <a:endParaRPr lang="en-US" sz="800" dirty="0"/>
-          </a:p>
-        </p:txBody>
-      </p:sp>
       <p:cxnSp>
         <p:nvCxnSpPr>
           <p:cNvPr id="439" name="Straight Connector 438">
@@ -13733,7 +13680,7 @@
         </p:nvCxnSpPr>
         <p:spPr>
           <a:xfrm flipH="1">
-            <a:off x="9128752" y="467096"/>
+            <a:off x="9128752" y="626116"/>
             <a:ext cx="853503" cy="0"/>
           </a:xfrm>
           <a:prstGeom prst="line">
@@ -13772,7 +13719,7 @@
         </p:nvCxnSpPr>
         <p:spPr>
           <a:xfrm flipH="1">
-            <a:off x="7637108" y="467096"/>
+            <a:off x="7637108" y="626116"/>
             <a:ext cx="737982" cy="0"/>
           </a:xfrm>
           <a:prstGeom prst="line">
@@ -13813,7 +13760,7 @@
         </p:nvCxnSpPr>
         <p:spPr>
           <a:xfrm flipH="1">
-            <a:off x="7468470" y="246298"/>
+            <a:off x="7468470" y="405318"/>
             <a:ext cx="168638" cy="0"/>
           </a:xfrm>
           <a:prstGeom prst="line">
@@ -13854,7 +13801,7 @@
         </p:nvCxnSpPr>
         <p:spPr>
           <a:xfrm flipH="1">
-            <a:off x="7468470" y="496602"/>
+            <a:off x="7468470" y="655622"/>
             <a:ext cx="168638" cy="0"/>
           </a:xfrm>
           <a:prstGeom prst="line">
@@ -13895,7 +13842,7 @@
         </p:nvCxnSpPr>
         <p:spPr>
           <a:xfrm flipH="1">
-            <a:off x="7468470" y="762052"/>
+            <a:off x="7468470" y="921072"/>
             <a:ext cx="168638" cy="0"/>
           </a:xfrm>
           <a:prstGeom prst="line">
@@ -13936,7 +13883,7 @@
         </p:nvCxnSpPr>
         <p:spPr>
           <a:xfrm flipH="1">
-            <a:off x="7468470" y="1014387"/>
+            <a:off x="7468470" y="1173407"/>
             <a:ext cx="168638" cy="0"/>
           </a:xfrm>
           <a:prstGeom prst="line">
@@ -13977,7 +13924,7 @@
         </p:nvCxnSpPr>
         <p:spPr>
           <a:xfrm flipH="1">
-            <a:off x="7468470" y="1294071"/>
+            <a:off x="7468470" y="1453091"/>
             <a:ext cx="168638" cy="0"/>
           </a:xfrm>
           <a:prstGeom prst="line">
@@ -14006,20 +13953,22 @@
       </p:cxnSp>
       <p:cxnSp>
         <p:nvCxnSpPr>
-          <p:cNvPr id="447" name="Straight Connector 446">
-            <a:extLst>
-              <a:ext uri="{FF2B5EF4-FFF2-40B4-BE49-F238E27FC236}">
-                <a16:creationId xmlns:a16="http://schemas.microsoft.com/office/drawing/2014/main" id="{7C16D6D3-BBA5-37BC-3F50-0A27C72073DF}"/>
-              </a:ext>
-            </a:extLst>
-          </p:cNvPr>
-          <p:cNvCxnSpPr/>
+          <p:cNvPr id="449" name="Straight Connector 448">
+            <a:extLst>
+              <a:ext uri="{FF2B5EF4-FFF2-40B4-BE49-F238E27FC236}">
+                <a16:creationId xmlns:a16="http://schemas.microsoft.com/office/drawing/2014/main" id="{8DA32FDB-319E-E42E-8A88-07B31381A838}"/>
+              </a:ext>
+            </a:extLst>
+          </p:cNvPr>
+          <p:cNvCxnSpPr>
+            <a:cxnSpLocks/>
+          </p:cNvCxnSpPr>
           <p:nvPr/>
         </p:nvCxnSpPr>
         <p:spPr>
-          <a:xfrm flipH="1">
-            <a:off x="7475636" y="1545854"/>
-            <a:ext cx="168638" cy="0"/>
+          <a:xfrm>
+            <a:off x="7637108" y="405318"/>
+            <a:ext cx="0" cy="1047773"/>
           </a:xfrm>
           <a:prstGeom prst="line">
             <a:avLst/>
@@ -14045,49 +13994,6 @@
           </a:fontRef>
         </p:style>
       </p:cxnSp>
-      <p:cxnSp>
-        <p:nvCxnSpPr>
-          <p:cNvPr id="449" name="Straight Connector 448">
-            <a:extLst>
-              <a:ext uri="{FF2B5EF4-FFF2-40B4-BE49-F238E27FC236}">
-                <a16:creationId xmlns:a16="http://schemas.microsoft.com/office/drawing/2014/main" id="{8DA32FDB-319E-E42E-8A88-07B31381A838}"/>
-              </a:ext>
-            </a:extLst>
-          </p:cNvPr>
-          <p:cNvCxnSpPr>
-            <a:cxnSpLocks/>
-          </p:cNvCxnSpPr>
-          <p:nvPr/>
-        </p:nvCxnSpPr>
-        <p:spPr>
-          <a:xfrm>
-            <a:off x="7637108" y="246298"/>
-            <a:ext cx="0" cy="1554576"/>
-          </a:xfrm>
-          <a:prstGeom prst="line">
-            <a:avLst/>
-          </a:prstGeom>
-          <a:ln>
-            <a:solidFill>
-              <a:schemeClr val="tx1"/>
-            </a:solidFill>
-          </a:ln>
-        </p:spPr>
-        <p:style>
-          <a:lnRef idx="2">
-            <a:schemeClr val="accent1"/>
-          </a:lnRef>
-          <a:fillRef idx="0">
-            <a:schemeClr val="accent1"/>
-          </a:fillRef>
-          <a:effectRef idx="1">
-            <a:schemeClr val="accent1"/>
-          </a:effectRef>
-          <a:fontRef idx="minor">
-            <a:schemeClr val="tx1"/>
-          </a:fontRef>
-        </p:style>
-      </p:cxnSp>
       <p:sp>
         <p:nvSpPr>
           <p:cNvPr id="451" name="TextBox 450">
@@ -14102,7 +14008,7 @@
         </p:nvSpPr>
         <p:spPr>
           <a:xfrm>
-            <a:off x="7601028" y="583130"/>
+            <a:off x="7601028" y="742150"/>
             <a:ext cx="226828" cy="215444"/>
           </a:xfrm>
           <a:prstGeom prst="rect">
@@ -14138,7 +14044,7 @@
         </p:nvSpPr>
         <p:spPr>
           <a:xfrm>
-            <a:off x="10326873" y="3392390"/>
+            <a:off x="10326873" y="3551410"/>
             <a:ext cx="226828" cy="215444"/>
           </a:xfrm>
           <a:prstGeom prst="rect">
@@ -14160,100 +14066,6 @@
           </a:p>
         </p:txBody>
       </p:sp>
-      <p:sp>
-        <p:nvSpPr>
-          <p:cNvPr id="454" name="Oval 453">
-            <a:extLst>
-              <a:ext uri="{FF2B5EF4-FFF2-40B4-BE49-F238E27FC236}">
-                <a16:creationId xmlns:a16="http://schemas.microsoft.com/office/drawing/2014/main" id="{45C23B80-5021-A088-08A4-CCB545DC29D3}"/>
-              </a:ext>
-            </a:extLst>
-          </p:cNvPr>
-          <p:cNvSpPr/>
-          <p:nvPr/>
-        </p:nvSpPr>
-        <p:spPr>
-          <a:xfrm>
-            <a:off x="6163103" y="1706842"/>
-            <a:ext cx="1305367" cy="212379"/>
-          </a:xfrm>
-          <a:prstGeom prst="ellipse">
-            <a:avLst/>
-          </a:prstGeom>
-          <a:solidFill>
-            <a:schemeClr val="accent6"/>
-          </a:solidFill>
-        </p:spPr>
-        <p:style>
-          <a:lnRef idx="2">
-            <a:schemeClr val="accent1">
-              <a:shade val="15000"/>
-            </a:schemeClr>
-          </a:lnRef>
-          <a:fillRef idx="1">
-            <a:schemeClr val="accent1"/>
-          </a:fillRef>
-          <a:effectRef idx="0">
-            <a:schemeClr val="accent1"/>
-          </a:effectRef>
-          <a:fontRef idx="minor">
-            <a:schemeClr val="lt1"/>
-          </a:fontRef>
-        </p:style>
-        <p:txBody>
-          <a:bodyPr rtlCol="0" anchor="ctr"/>
-          <a:lstStyle/>
-          <a:p>
-            <a:pPr algn="ctr"/>
-            <a:r>
-              <a:rPr lang="en-US" sz="800" dirty="0" err="1"/>
-              <a:t>user_id</a:t>
-            </a:r>
-            <a:endParaRPr lang="en-US" sz="800" dirty="0"/>
-          </a:p>
-        </p:txBody>
-      </p:sp>
-      <p:cxnSp>
-        <p:nvCxnSpPr>
-          <p:cNvPr id="455" name="Straight Connector 454">
-            <a:extLst>
-              <a:ext uri="{FF2B5EF4-FFF2-40B4-BE49-F238E27FC236}">
-                <a16:creationId xmlns:a16="http://schemas.microsoft.com/office/drawing/2014/main" id="{D3332EA4-FA9D-16EF-A319-7EF248751C01}"/>
-              </a:ext>
-            </a:extLst>
-          </p:cNvPr>
-          <p:cNvCxnSpPr/>
-          <p:nvPr/>
-        </p:nvCxnSpPr>
-        <p:spPr>
-          <a:xfrm flipH="1">
-            <a:off x="7468470" y="1800874"/>
-            <a:ext cx="168638" cy="0"/>
-          </a:xfrm>
-          <a:prstGeom prst="line">
-            <a:avLst/>
-          </a:prstGeom>
-          <a:ln>
-            <a:solidFill>
-              <a:schemeClr val="tx1"/>
-            </a:solidFill>
-          </a:ln>
-        </p:spPr>
-        <p:style>
-          <a:lnRef idx="2">
-            <a:schemeClr val="accent1"/>
-          </a:lnRef>
-          <a:fillRef idx="0">
-            <a:schemeClr val="accent1"/>
-          </a:fillRef>
-          <a:effectRef idx="1">
-            <a:schemeClr val="accent1"/>
-          </a:effectRef>
-          <a:fontRef idx="minor">
-            <a:schemeClr val="tx1"/>
-          </a:fontRef>
-        </p:style>
-      </p:cxnSp>
       <p:cxnSp>
         <p:nvCxnSpPr>
           <p:cNvPr id="458" name="Elbow Connector 457">
@@ -14270,7 +14082,7 @@
         </p:nvCxnSpPr>
         <p:spPr>
           <a:xfrm flipV="1">
-            <a:off x="4068292" y="2067252"/>
+            <a:off x="4068292" y="2226272"/>
             <a:ext cx="3286438" cy="548938"/>
           </a:xfrm>
           <a:prstGeom prst="bentConnector3">
@@ -14315,7 +14127,7 @@
         </p:nvCxnSpPr>
         <p:spPr>
           <a:xfrm flipV="1">
-            <a:off x="7307057" y="1591489"/>
+            <a:off x="7307057" y="1750509"/>
             <a:ext cx="1444864" cy="471383"/>
           </a:xfrm>
           <a:prstGeom prst="bentConnector3">
@@ -14358,7 +14170,7 @@
         </p:nvSpPr>
         <p:spPr>
           <a:xfrm>
-            <a:off x="8407302" y="821333"/>
+            <a:off x="8407302" y="980353"/>
             <a:ext cx="689237" cy="595856"/>
           </a:xfrm>
           <a:prstGeom prst="diamond">
@@ -14407,7 +14219,7 @@
         </p:nvSpPr>
         <p:spPr>
           <a:xfrm>
-            <a:off x="8462122" y="942600"/>
+            <a:off x="8462122" y="1101620"/>
             <a:ext cx="621985" cy="338554"/>
           </a:xfrm>
           <a:prstGeom prst="rect">
@@ -14461,7 +14273,7 @@
         </p:nvCxnSpPr>
         <p:spPr>
           <a:xfrm>
-            <a:off x="8751921" y="626194"/>
+            <a:off x="8751921" y="785214"/>
             <a:ext cx="0" cy="195139"/>
           </a:xfrm>
           <a:prstGeom prst="line">
@@ -14502,7 +14314,7 @@
         </p:nvCxnSpPr>
         <p:spPr>
           <a:xfrm>
-            <a:off x="8751921" y="1401393"/>
+            <a:off x="8751921" y="1560413"/>
             <a:ext cx="0" cy="195139"/>
           </a:xfrm>
           <a:prstGeom prst="line">
@@ -14543,7 +14355,7 @@
         </p:nvSpPr>
         <p:spPr>
           <a:xfrm>
-            <a:off x="4034090" y="2439176"/>
+            <a:off x="4034090" y="2598196"/>
             <a:ext cx="226828" cy="215444"/>
           </a:xfrm>
           <a:prstGeom prst="rect">
@@ -14578,7 +14390,7 @@
         </p:nvSpPr>
         <p:spPr>
           <a:xfrm>
-            <a:off x="8582853" y="602792"/>
+            <a:off x="8582853" y="761812"/>
             <a:ext cx="226828" cy="215444"/>
           </a:xfrm>
           <a:prstGeom prst="rect">
@@ -14599,6 +14411,100 @@
           </a:p>
         </p:txBody>
       </p:sp>
+      <p:sp>
+        <p:nvSpPr>
+          <p:cNvPr id="23" name="Oval 22">
+            <a:extLst>
+              <a:ext uri="{FF2B5EF4-FFF2-40B4-BE49-F238E27FC236}">
+                <a16:creationId xmlns:a16="http://schemas.microsoft.com/office/drawing/2014/main" id="{9FAED3DC-FB20-6D24-A08A-B6B6B8078C4F}"/>
+              </a:ext>
+            </a:extLst>
+          </p:cNvPr>
+          <p:cNvSpPr/>
+          <p:nvPr/>
+        </p:nvSpPr>
+        <p:spPr>
+          <a:xfrm>
+            <a:off x="4146373" y="18274"/>
+            <a:ext cx="1285559" cy="223761"/>
+          </a:xfrm>
+          <a:prstGeom prst="ellipse">
+            <a:avLst/>
+          </a:prstGeom>
+          <a:solidFill>
+            <a:schemeClr val="accent6"/>
+          </a:solidFill>
+        </p:spPr>
+        <p:style>
+          <a:lnRef idx="2">
+            <a:schemeClr val="accent1">
+              <a:shade val="15000"/>
+            </a:schemeClr>
+          </a:lnRef>
+          <a:fillRef idx="1">
+            <a:schemeClr val="accent1"/>
+          </a:fillRef>
+          <a:effectRef idx="0">
+            <a:schemeClr val="accent1"/>
+          </a:effectRef>
+          <a:fontRef idx="minor">
+            <a:schemeClr val="lt1"/>
+          </a:fontRef>
+        </p:style>
+        <p:txBody>
+          <a:bodyPr rtlCol="0" anchor="ctr"/>
+          <a:lstStyle/>
+          <a:p>
+            <a:pPr algn="ctr"/>
+            <a:r>
+              <a:rPr lang="en-US" sz="800" dirty="0" err="1"/>
+              <a:t>store_id</a:t>
+            </a:r>
+            <a:endParaRPr lang="en-US" sz="800" dirty="0"/>
+          </a:p>
+        </p:txBody>
+      </p:sp>
+      <p:cxnSp>
+        <p:nvCxnSpPr>
+          <p:cNvPr id="24" name="Straight Connector 23">
+            <a:extLst>
+              <a:ext uri="{FF2B5EF4-FFF2-40B4-BE49-F238E27FC236}">
+                <a16:creationId xmlns:a16="http://schemas.microsoft.com/office/drawing/2014/main" id="{69FD695C-B2B7-D6F4-EB77-4EFEA6B62A43}"/>
+              </a:ext>
+            </a:extLst>
+          </p:cNvPr>
+          <p:cNvCxnSpPr/>
+          <p:nvPr/>
+        </p:nvCxnSpPr>
+        <p:spPr>
+          <a:xfrm flipH="1">
+            <a:off x="3977734" y="131796"/>
+            <a:ext cx="168638" cy="0"/>
+          </a:xfrm>
+          <a:prstGeom prst="line">
+            <a:avLst/>
+          </a:prstGeom>
+          <a:ln>
+            <a:solidFill>
+              <a:schemeClr val="tx1"/>
+            </a:solidFill>
+          </a:ln>
+        </p:spPr>
+        <p:style>
+          <a:lnRef idx="2">
+            <a:schemeClr val="accent1"/>
+          </a:lnRef>
+          <a:fillRef idx="0">
+            <a:schemeClr val="accent1"/>
+          </a:fillRef>
+          <a:effectRef idx="1">
+            <a:schemeClr val="accent1"/>
+          </a:effectRef>
+          <a:fontRef idx="minor">
+            <a:schemeClr val="tx1"/>
+          </a:fontRef>
+        </p:style>
+      </p:cxnSp>
     </p:spTree>
     <p:extLst>
       <p:ext uri="{BB962C8B-B14F-4D97-AF65-F5344CB8AC3E}">
